--- a/downloads/rooms/data.pptx
+++ b/downloads/rooms/data.pptx
@@ -8,6 +8,10 @@
     <p:sldId id="256" r:id="rId7"/>
     <p:sldId id="257" r:id="rId8"/>
     <p:sldId id="258" r:id="rId9"/>
+    <p:sldId id="259" r:id="rId10"/>
+    <p:sldId id="260" r:id="rId11"/>
+    <p:sldId id="261" r:id="rId12"/>
+    <p:sldId id="262" r:id="rId13"/>
   </p:sldIdLst>
   <p:sldSz cx="12191695" cy="6858000" type="screen4x3"/>
   <p:notesSz cx="6858000" cy="9144000"/>
@@ -3099,7 +3103,7 @@
         <p:spPr>
           <a:xfrm>
             <a:off x="457200" y="274320"/>
-            <a:ext cx="11155680" cy="731520"/>
+            <a:ext cx="11155680" cy="640080"/>
           </a:xfrm>
           <a:prstGeom prst="rect">
             <a:avLst/>
@@ -3129,8 +3133,8 @@
         </p:nvSpPr>
         <p:spPr>
           <a:xfrm>
-            <a:off x="548640" y="1188720"/>
-            <a:ext cx="10972800" cy="4206240"/>
+            <a:off x="548640" y="1051560"/>
+            <a:ext cx="10972800" cy="4297680"/>
           </a:xfrm>
           <a:prstGeom prst="rect">
             <a:avLst/>
@@ -3322,7 +3326,7 @@
         <p:spPr>
           <a:xfrm>
             <a:off x="457200" y="274320"/>
-            <a:ext cx="11155680" cy="731520"/>
+            <a:ext cx="11155680" cy="640080"/>
           </a:xfrm>
           <a:prstGeom prst="rect">
             <a:avLst/>
@@ -3352,8 +3356,8 @@
         </p:nvSpPr>
         <p:spPr>
           <a:xfrm>
-            <a:off x="548640" y="1188720"/>
-            <a:ext cx="10972800" cy="4206240"/>
+            <a:off x="548640" y="1051560"/>
+            <a:ext cx="10972800" cy="4297680"/>
           </a:xfrm>
           <a:prstGeom prst="rect">
             <a:avLst/>
@@ -3537,7 +3541,7 @@
         <p:spPr>
           <a:xfrm>
             <a:off x="457200" y="274320"/>
-            <a:ext cx="11155680" cy="731520"/>
+            <a:ext cx="11155680" cy="640080"/>
           </a:xfrm>
           <a:prstGeom prst="rect">
             <a:avLst/>
@@ -3567,8 +3571,8 @@
         </p:nvSpPr>
         <p:spPr>
           <a:xfrm>
-            <a:off x="548640" y="1188720"/>
-            <a:ext cx="10972800" cy="4206240"/>
+            <a:off x="548640" y="1051560"/>
+            <a:ext cx="10972800" cy="4297680"/>
           </a:xfrm>
           <a:prstGeom prst="rect">
             <a:avLst/>
@@ -3594,6 +3598,1010 @@
             </a:pPr>
             <a:r>
               <a:t>Contact is the form on the lab website.</a:t>
+            </a:r>
+          </a:p>
+        </p:txBody>
+      </p:sp>
+      <p:sp>
+        <p:nvSpPr>
+          <p:cNvPr id="4" name="TextBox 3"/>
+          <p:cNvSpPr txBox="1"/>
+          <p:nvPr/>
+        </p:nvSpPr>
+        <p:spPr>
+          <a:xfrm>
+            <a:off x="457200" y="5623560"/>
+            <a:ext cx="11155680" cy="1005840"/>
+          </a:xfrm>
+          <a:prstGeom prst="rect">
+            <a:avLst/>
+          </a:prstGeom>
+          <a:noFill/>
+        </p:spPr>
+        <p:txBody>
+          <a:bodyPr wrap="square">
+            <a:spAutoFit/>
+          </a:bodyPr>
+          <a:lstStyle/>
+          <a:p>
+            <a:pPr>
+              <a:defRPr sz="1000"/>
+            </a:pPr>
+            <a:r>
+              <a:t>CypherMonkey Labs · © 2026 CypherMonkeyLabs</a:t>
+            </a:r>
+          </a:p>
+          <a:p>
+            <a:r>
+              <a:t>Independent, free, learning-only student project. Respects every company and vendor. Trademarks belong to their owners. Not affiliated or endorsed. Concerns are removed or corrected promptly via the contact form at https</a:t>
+            </a:r>
+          </a:p>
+        </p:txBody>
+      </p:sp>
+      <p:sp>
+        <p:nvSpPr>
+          <p:cNvPr id="5" name="TextBox 4">
+            <a:hlinkClick r:id="rId2"/>
+          </p:cNvPr>
+          <p:cNvSpPr txBox="1"/>
+          <p:nvPr/>
+        </p:nvSpPr>
+        <p:spPr>
+          <a:xfrm>
+            <a:off x="457200" y="6355080"/>
+            <a:ext cx="2011680" cy="320040"/>
+          </a:xfrm>
+          <a:prstGeom prst="rect">
+            <a:avLst/>
+          </a:prstGeom>
+          <a:noFill/>
+        </p:spPr>
+        <p:txBody>
+          <a:bodyPr wrap="none">
+            <a:spAutoFit/>
+          </a:bodyPr>
+          <a:lstStyle/>
+          <a:p>
+            <a:pPr>
+              <a:defRPr sz="1200"/>
+            </a:pPr>
+            <a:r>
+              <a:t>Website</a:t>
+            </a:r>
+          </a:p>
+        </p:txBody>
+      </p:sp>
+      <p:sp>
+        <p:nvSpPr>
+          <p:cNvPr id="6" name="TextBox 5">
+            <a:hlinkClick r:id="rId3"/>
+          </p:cNvPr>
+          <p:cNvSpPr txBox="1"/>
+          <p:nvPr/>
+        </p:nvSpPr>
+        <p:spPr>
+          <a:xfrm>
+            <a:off x="2560320" y="6355080"/>
+            <a:ext cx="2011680" cy="320040"/>
+          </a:xfrm>
+          <a:prstGeom prst="rect">
+            <a:avLst/>
+          </a:prstGeom>
+          <a:noFill/>
+        </p:spPr>
+        <p:txBody>
+          <a:bodyPr wrap="none">
+            <a:spAutoFit/>
+          </a:bodyPr>
+          <a:lstStyle/>
+          <a:p>
+            <a:pPr>
+              <a:defRPr sz="1200"/>
+            </a:pPr>
+            <a:r>
+              <a:t>GitHub</a:t>
+            </a:r>
+          </a:p>
+        </p:txBody>
+      </p:sp>
+      <p:sp>
+        <p:nvSpPr>
+          <p:cNvPr id="7" name="TextBox 6">
+            <a:hlinkClick r:id="rId4"/>
+          </p:cNvPr>
+          <p:cNvSpPr txBox="1"/>
+          <p:nvPr/>
+        </p:nvSpPr>
+        <p:spPr>
+          <a:xfrm>
+            <a:off x="4663440" y="6355080"/>
+            <a:ext cx="2011680" cy="320040"/>
+          </a:xfrm>
+          <a:prstGeom prst="rect">
+            <a:avLst/>
+          </a:prstGeom>
+          <a:noFill/>
+        </p:spPr>
+        <p:txBody>
+          <a:bodyPr wrap="none">
+            <a:spAutoFit/>
+          </a:bodyPr>
+          <a:lstStyle/>
+          <a:p>
+            <a:pPr>
+              <a:defRPr sz="1200"/>
+            </a:pPr>
+            <a:r>
+              <a:t>Profile</a:t>
+            </a:r>
+          </a:p>
+        </p:txBody>
+      </p:sp>
+    </p:spTree>
+  </p:cSld>
+  <p:clrMapOvr>
+    <a:masterClrMapping/>
+  </p:clrMapOvr>
+</p:sld>
+</file>
+
+<file path=ppt/slides/slide4.xml><?xml version="1.0" encoding="utf-8"?>
+<p:sld xmlns:a="http://schemas.openxmlformats.org/drawingml/2006/main" xmlns:p="http://schemas.openxmlformats.org/presentationml/2006/main" xmlns:r="http://schemas.openxmlformats.org/officeDocument/2006/relationships">
+  <p:cSld>
+    <p:spTree>
+      <p:nvGrpSpPr>
+        <p:cNvPr id="1" name=""/>
+        <p:cNvGrpSpPr/>
+        <p:nvPr/>
+      </p:nvGrpSpPr>
+      <p:grpSpPr/>
+      <p:sp>
+        <p:nvSpPr>
+          <p:cNvPr id="2" name="TextBox 1"/>
+          <p:cNvSpPr txBox="1"/>
+          <p:nvPr/>
+        </p:nvSpPr>
+        <p:spPr>
+          <a:xfrm>
+            <a:off x="457200" y="274320"/>
+            <a:ext cx="11155680" cy="640080"/>
+          </a:xfrm>
+          <a:prstGeom prst="rect">
+            <a:avLst/>
+          </a:prstGeom>
+          <a:noFill/>
+        </p:spPr>
+        <p:txBody>
+          <a:bodyPr wrap="none">
+            <a:spAutoFit/>
+          </a:bodyPr>
+          <a:lstStyle/>
+          <a:p>
+            <a:pPr>
+              <a:defRPr sz="2800" b="1"/>
+            </a:pPr>
+            <a:r>
+              <a:t>Sources and go deeper</a:t>
+            </a:r>
+          </a:p>
+        </p:txBody>
+      </p:sp>
+      <p:sp>
+        <p:nvSpPr>
+          <p:cNvPr id="3" name="TextBox 2"/>
+          <p:cNvSpPr txBox="1"/>
+          <p:nvPr/>
+        </p:nvSpPr>
+        <p:spPr>
+          <a:xfrm>
+            <a:off x="548640" y="1051560"/>
+            <a:ext cx="10972800" cy="4297680"/>
+          </a:xfrm>
+          <a:prstGeom prst="rect">
+            <a:avLst/>
+          </a:prstGeom>
+          <a:noFill/>
+        </p:spPr>
+        <p:txBody>
+          <a:bodyPr wrap="square">
+            <a:spAutoFit/>
+          </a:bodyPr>
+          <a:lstStyle/>
+          <a:p>
+            <a:pPr>
+              <a:defRPr sz="1400"/>
+            </a:pPr>
+            <a:r>
+              <a:t>IIBA KnowledgeHub, including the BABOK Guide contents (standard). https://www.iiba.org/knowledgehub/ last checked 2026-10.</a:t>
+            </a:r>
+          </a:p>
+          <a:p>
+            <a:pPr>
+              <a:defRPr sz="1400"/>
+            </a:pPr>
+            <a:r>
+              <a:t>BABOK Guide article on the IIBA knowledge hub (standard). confirm. last checked 2026-10.</a:t>
+            </a:r>
+          </a:p>
+          <a:p>
+            <a:pPr>
+              <a:defRPr sz="1400"/>
+            </a:pPr>
+            <a:r>
+              <a:t>IIBA home (official). https://www.iiba.org/ last checked 2026-10.</a:t>
+            </a:r>
+          </a:p>
+          <a:p>
+            <a:pPr>
+              <a:defRPr sz="1400"/>
+            </a:pPr>
+            <a:r>
+              <a:t>Manifesto for Agile Software Development (standard). https://agilemanifesto.org/ last checked 2026-10.</a:t>
+            </a:r>
+          </a:p>
+          <a:p>
+            <a:pPr>
+              <a:defRPr sz="1400"/>
+            </a:pPr>
+            <a:r>
+              <a:t>Principles behind the Agile Manifesto (standard). https://agilemanifesto.org/principles.html last checked 2026-10.</a:t>
+            </a:r>
+          </a:p>
+          <a:p>
+            <a:pPr>
+              <a:defRPr sz="1400"/>
+            </a:pPr>
+            <a:r>
+              <a:t>OMG, about BPMN 2.0 (standard). https://www.omg.org/spec/BPMN/2.0/About-BPMN last checked 2026-10.</a:t>
+            </a:r>
+          </a:p>
+          <a:p>
+            <a:pPr>
+              <a:defRPr sz="1400"/>
+            </a:pPr>
+            <a:r>
+              <a:t>BPMN 2.0 specification PDF (standard). https://www.omg.org/spec/BPMN/2.0/PDF last checked 2026-10.</a:t>
+            </a:r>
+          </a:p>
+        </p:txBody>
+      </p:sp>
+      <p:sp>
+        <p:nvSpPr>
+          <p:cNvPr id="4" name="TextBox 3"/>
+          <p:cNvSpPr txBox="1"/>
+          <p:nvPr/>
+        </p:nvSpPr>
+        <p:spPr>
+          <a:xfrm>
+            <a:off x="457200" y="5623560"/>
+            <a:ext cx="11155680" cy="1005840"/>
+          </a:xfrm>
+          <a:prstGeom prst="rect">
+            <a:avLst/>
+          </a:prstGeom>
+          <a:noFill/>
+        </p:spPr>
+        <p:txBody>
+          <a:bodyPr wrap="square">
+            <a:spAutoFit/>
+          </a:bodyPr>
+          <a:lstStyle/>
+          <a:p>
+            <a:pPr>
+              <a:defRPr sz="1000"/>
+            </a:pPr>
+            <a:r>
+              <a:t>CypherMonkey Labs · © 2026 CypherMonkeyLabs</a:t>
+            </a:r>
+          </a:p>
+          <a:p>
+            <a:r>
+              <a:t>Independent, free, learning-only student project. Respects every company and vendor. Trademarks belong to their owners. Not affiliated or endorsed. Concerns are removed or corrected promptly via the contact form at https</a:t>
+            </a:r>
+          </a:p>
+        </p:txBody>
+      </p:sp>
+      <p:sp>
+        <p:nvSpPr>
+          <p:cNvPr id="5" name="TextBox 4">
+            <a:hlinkClick r:id="rId2"/>
+          </p:cNvPr>
+          <p:cNvSpPr txBox="1"/>
+          <p:nvPr/>
+        </p:nvSpPr>
+        <p:spPr>
+          <a:xfrm>
+            <a:off x="457200" y="6355080"/>
+            <a:ext cx="2011680" cy="320040"/>
+          </a:xfrm>
+          <a:prstGeom prst="rect">
+            <a:avLst/>
+          </a:prstGeom>
+          <a:noFill/>
+        </p:spPr>
+        <p:txBody>
+          <a:bodyPr wrap="none">
+            <a:spAutoFit/>
+          </a:bodyPr>
+          <a:lstStyle/>
+          <a:p>
+            <a:pPr>
+              <a:defRPr sz="1200"/>
+            </a:pPr>
+            <a:r>
+              <a:t>Website</a:t>
+            </a:r>
+          </a:p>
+        </p:txBody>
+      </p:sp>
+      <p:sp>
+        <p:nvSpPr>
+          <p:cNvPr id="6" name="TextBox 5">
+            <a:hlinkClick r:id="rId3"/>
+          </p:cNvPr>
+          <p:cNvSpPr txBox="1"/>
+          <p:nvPr/>
+        </p:nvSpPr>
+        <p:spPr>
+          <a:xfrm>
+            <a:off x="2560320" y="6355080"/>
+            <a:ext cx="2011680" cy="320040"/>
+          </a:xfrm>
+          <a:prstGeom prst="rect">
+            <a:avLst/>
+          </a:prstGeom>
+          <a:noFill/>
+        </p:spPr>
+        <p:txBody>
+          <a:bodyPr wrap="none">
+            <a:spAutoFit/>
+          </a:bodyPr>
+          <a:lstStyle/>
+          <a:p>
+            <a:pPr>
+              <a:defRPr sz="1200"/>
+            </a:pPr>
+            <a:r>
+              <a:t>GitHub</a:t>
+            </a:r>
+          </a:p>
+        </p:txBody>
+      </p:sp>
+      <p:sp>
+        <p:nvSpPr>
+          <p:cNvPr id="7" name="TextBox 6">
+            <a:hlinkClick r:id="rId4"/>
+          </p:cNvPr>
+          <p:cNvSpPr txBox="1"/>
+          <p:nvPr/>
+        </p:nvSpPr>
+        <p:spPr>
+          <a:xfrm>
+            <a:off x="4663440" y="6355080"/>
+            <a:ext cx="2011680" cy="320040"/>
+          </a:xfrm>
+          <a:prstGeom prst="rect">
+            <a:avLst/>
+          </a:prstGeom>
+          <a:noFill/>
+        </p:spPr>
+        <p:txBody>
+          <a:bodyPr wrap="none">
+            <a:spAutoFit/>
+          </a:bodyPr>
+          <a:lstStyle/>
+          <a:p>
+            <a:pPr>
+              <a:defRPr sz="1200"/>
+            </a:pPr>
+            <a:r>
+              <a:t>Profile</a:t>
+            </a:r>
+          </a:p>
+        </p:txBody>
+      </p:sp>
+    </p:spTree>
+  </p:cSld>
+  <p:clrMapOvr>
+    <a:masterClrMapping/>
+  </p:clrMapOvr>
+</p:sld>
+</file>
+
+<file path=ppt/slides/slide5.xml><?xml version="1.0" encoding="utf-8"?>
+<p:sld xmlns:a="http://schemas.openxmlformats.org/drawingml/2006/main" xmlns:p="http://schemas.openxmlformats.org/presentationml/2006/main" xmlns:r="http://schemas.openxmlformats.org/officeDocument/2006/relationships">
+  <p:cSld>
+    <p:spTree>
+      <p:nvGrpSpPr>
+        <p:cNvPr id="1" name=""/>
+        <p:cNvGrpSpPr/>
+        <p:nvPr/>
+      </p:nvGrpSpPr>
+      <p:grpSpPr/>
+      <p:sp>
+        <p:nvSpPr>
+          <p:cNvPr id="2" name="TextBox 1"/>
+          <p:cNvSpPr txBox="1"/>
+          <p:nvPr/>
+        </p:nvSpPr>
+        <p:spPr>
+          <a:xfrm>
+            <a:off x="457200" y="274320"/>
+            <a:ext cx="11155680" cy="640080"/>
+          </a:xfrm>
+          <a:prstGeom prst="rect">
+            <a:avLst/>
+          </a:prstGeom>
+          <a:noFill/>
+        </p:spPr>
+        <p:txBody>
+          <a:bodyPr wrap="none">
+            <a:spAutoFit/>
+          </a:bodyPr>
+          <a:lstStyle/>
+          <a:p>
+            <a:pPr>
+              <a:defRPr sz="2800" b="1"/>
+            </a:pPr>
+            <a:r>
+              <a:t>Sources and go deeper, continued</a:t>
+            </a:r>
+          </a:p>
+        </p:txBody>
+      </p:sp>
+      <p:sp>
+        <p:nvSpPr>
+          <p:cNvPr id="3" name="TextBox 2"/>
+          <p:cNvSpPr txBox="1"/>
+          <p:nvPr/>
+        </p:nvSpPr>
+        <p:spPr>
+          <a:xfrm>
+            <a:off x="548640" y="1051560"/>
+            <a:ext cx="10972800" cy="4297680"/>
+          </a:xfrm>
+          <a:prstGeom prst="rect">
+            <a:avLst/>
+          </a:prstGeom>
+          <a:noFill/>
+        </p:spPr>
+        <p:txBody>
+          <a:bodyPr wrap="square">
+            <a:spAutoFit/>
+          </a:bodyPr>
+          <a:lstStyle/>
+          <a:p>
+            <a:pPr>
+              <a:defRPr sz="1400"/>
+            </a:pPr>
+            <a:r>
+              <a:t>OMG, about BPMN 2.0.2 (standard). https://www.omg.org/spec/BPMN/2.0.2/About-BPMN last checked 2026-10.</a:t>
+            </a:r>
+          </a:p>
+          <a:p>
+            <a:pPr>
+              <a:defRPr sz="1400"/>
+            </a:pPr>
+            <a:r>
+              <a:t>OMG, about UML 2.5.1 (standard). https://www.omg.org/spec/UML/2.5.1/About-UML last checked 2026-10.</a:t>
+            </a:r>
+          </a:p>
+          <a:p>
+            <a:pPr>
+              <a:defRPr sz="1400"/>
+            </a:pPr>
+            <a:r>
+              <a:t>UML 2.5.1 specification PDF (standard). https://www.omg.org/spec/UML/2.5.1/PDF last checked 2026-10.</a:t>
+            </a:r>
+          </a:p>
+          <a:p>
+            <a:pPr>
+              <a:defRPr sz="1400"/>
+            </a:pPr>
+            <a:r>
+              <a:t>IIBA membership (community). https://www.iiba.org/membership/ last checked 2026-10.</a:t>
+            </a:r>
+          </a:p>
+          <a:p>
+            <a:pPr>
+              <a:defRPr sz="1400"/>
+            </a:pPr>
+            <a:r>
+              <a:t>OMG managed communities (community). https://www.omg.org/communities/ last checked 2026-10.</a:t>
+            </a:r>
+          </a:p>
+          <a:p>
+            <a:pPr>
+              <a:defRPr sz="1400"/>
+            </a:pPr>
+            <a:r>
+              <a:t>PostgreSQL, SQL introduction (official). https://www.postgresql.org/docs/current/tutorial-sql-intro.html last checked 2026-10.</a:t>
+            </a:r>
+          </a:p>
+          <a:p>
+            <a:pPr>
+              <a:defRPr sz="1400"/>
+            </a:pPr>
+            <a:r>
+              <a:t>PostgreSQL, the SQL language (official). https://www.postgresql.org/docs/current/tutorial-sql.html last checked 2026-10.</a:t>
+            </a:r>
+          </a:p>
+        </p:txBody>
+      </p:sp>
+      <p:sp>
+        <p:nvSpPr>
+          <p:cNvPr id="4" name="TextBox 3"/>
+          <p:cNvSpPr txBox="1"/>
+          <p:nvPr/>
+        </p:nvSpPr>
+        <p:spPr>
+          <a:xfrm>
+            <a:off x="457200" y="5623560"/>
+            <a:ext cx="11155680" cy="1005840"/>
+          </a:xfrm>
+          <a:prstGeom prst="rect">
+            <a:avLst/>
+          </a:prstGeom>
+          <a:noFill/>
+        </p:spPr>
+        <p:txBody>
+          <a:bodyPr wrap="square">
+            <a:spAutoFit/>
+          </a:bodyPr>
+          <a:lstStyle/>
+          <a:p>
+            <a:pPr>
+              <a:defRPr sz="1000"/>
+            </a:pPr>
+            <a:r>
+              <a:t>CypherMonkey Labs · © 2026 CypherMonkeyLabs</a:t>
+            </a:r>
+          </a:p>
+          <a:p>
+            <a:r>
+              <a:t>Independent, free, learning-only student project. Respects every company and vendor. Trademarks belong to their owners. Not affiliated or endorsed. Concerns are removed or corrected promptly via the contact form at https</a:t>
+            </a:r>
+          </a:p>
+        </p:txBody>
+      </p:sp>
+      <p:sp>
+        <p:nvSpPr>
+          <p:cNvPr id="5" name="TextBox 4">
+            <a:hlinkClick r:id="rId2"/>
+          </p:cNvPr>
+          <p:cNvSpPr txBox="1"/>
+          <p:nvPr/>
+        </p:nvSpPr>
+        <p:spPr>
+          <a:xfrm>
+            <a:off x="457200" y="6355080"/>
+            <a:ext cx="2011680" cy="320040"/>
+          </a:xfrm>
+          <a:prstGeom prst="rect">
+            <a:avLst/>
+          </a:prstGeom>
+          <a:noFill/>
+        </p:spPr>
+        <p:txBody>
+          <a:bodyPr wrap="none">
+            <a:spAutoFit/>
+          </a:bodyPr>
+          <a:lstStyle/>
+          <a:p>
+            <a:pPr>
+              <a:defRPr sz="1200"/>
+            </a:pPr>
+            <a:r>
+              <a:t>Website</a:t>
+            </a:r>
+          </a:p>
+        </p:txBody>
+      </p:sp>
+      <p:sp>
+        <p:nvSpPr>
+          <p:cNvPr id="6" name="TextBox 5">
+            <a:hlinkClick r:id="rId3"/>
+          </p:cNvPr>
+          <p:cNvSpPr txBox="1"/>
+          <p:nvPr/>
+        </p:nvSpPr>
+        <p:spPr>
+          <a:xfrm>
+            <a:off x="2560320" y="6355080"/>
+            <a:ext cx="2011680" cy="320040"/>
+          </a:xfrm>
+          <a:prstGeom prst="rect">
+            <a:avLst/>
+          </a:prstGeom>
+          <a:noFill/>
+        </p:spPr>
+        <p:txBody>
+          <a:bodyPr wrap="none">
+            <a:spAutoFit/>
+          </a:bodyPr>
+          <a:lstStyle/>
+          <a:p>
+            <a:pPr>
+              <a:defRPr sz="1200"/>
+            </a:pPr>
+            <a:r>
+              <a:t>GitHub</a:t>
+            </a:r>
+          </a:p>
+        </p:txBody>
+      </p:sp>
+      <p:sp>
+        <p:nvSpPr>
+          <p:cNvPr id="7" name="TextBox 6">
+            <a:hlinkClick r:id="rId4"/>
+          </p:cNvPr>
+          <p:cNvSpPr txBox="1"/>
+          <p:nvPr/>
+        </p:nvSpPr>
+        <p:spPr>
+          <a:xfrm>
+            <a:off x="4663440" y="6355080"/>
+            <a:ext cx="2011680" cy="320040"/>
+          </a:xfrm>
+          <a:prstGeom prst="rect">
+            <a:avLst/>
+          </a:prstGeom>
+          <a:noFill/>
+        </p:spPr>
+        <p:txBody>
+          <a:bodyPr wrap="none">
+            <a:spAutoFit/>
+          </a:bodyPr>
+          <a:lstStyle/>
+          <a:p>
+            <a:pPr>
+              <a:defRPr sz="1200"/>
+            </a:pPr>
+            <a:r>
+              <a:t>Profile</a:t>
+            </a:r>
+          </a:p>
+        </p:txBody>
+      </p:sp>
+    </p:spTree>
+  </p:cSld>
+  <p:clrMapOvr>
+    <a:masterClrMapping/>
+  </p:clrMapOvr>
+</p:sld>
+</file>
+
+<file path=ppt/slides/slide6.xml><?xml version="1.0" encoding="utf-8"?>
+<p:sld xmlns:a="http://schemas.openxmlformats.org/drawingml/2006/main" xmlns:p="http://schemas.openxmlformats.org/presentationml/2006/main" xmlns:r="http://schemas.openxmlformats.org/officeDocument/2006/relationships">
+  <p:cSld>
+    <p:spTree>
+      <p:nvGrpSpPr>
+        <p:cNvPr id="1" name=""/>
+        <p:cNvGrpSpPr/>
+        <p:nvPr/>
+      </p:nvGrpSpPr>
+      <p:grpSpPr/>
+      <p:sp>
+        <p:nvSpPr>
+          <p:cNvPr id="2" name="TextBox 1"/>
+          <p:cNvSpPr txBox="1"/>
+          <p:nvPr/>
+        </p:nvSpPr>
+        <p:spPr>
+          <a:xfrm>
+            <a:off x="457200" y="274320"/>
+            <a:ext cx="11155680" cy="640080"/>
+          </a:xfrm>
+          <a:prstGeom prst="rect">
+            <a:avLst/>
+          </a:prstGeom>
+          <a:noFill/>
+        </p:spPr>
+        <p:txBody>
+          <a:bodyPr wrap="none">
+            <a:spAutoFit/>
+          </a:bodyPr>
+          <a:lstStyle/>
+          <a:p>
+            <a:pPr>
+              <a:defRPr sz="2800" b="1"/>
+            </a:pPr>
+            <a:r>
+              <a:t>Sources and go deeper, continued</a:t>
+            </a:r>
+          </a:p>
+        </p:txBody>
+      </p:sp>
+      <p:sp>
+        <p:nvSpPr>
+          <p:cNvPr id="3" name="TextBox 2"/>
+          <p:cNvSpPr txBox="1"/>
+          <p:nvPr/>
+        </p:nvSpPr>
+        <p:spPr>
+          <a:xfrm>
+            <a:off x="548640" y="1051560"/>
+            <a:ext cx="10972800" cy="4297680"/>
+          </a:xfrm>
+          <a:prstGeom prst="rect">
+            <a:avLst/>
+          </a:prstGeom>
+          <a:noFill/>
+        </p:spPr>
+        <p:txBody>
+          <a:bodyPr wrap="square">
+            <a:spAutoFit/>
+          </a:bodyPr>
+          <a:lstStyle/>
+          <a:p>
+            <a:pPr>
+              <a:defRPr sz="1400"/>
+            </a:pPr>
+            <a:r>
+              <a:t>IEEE Task Force on Process Mining (official). https://www.tf-pm.org/ last checked 2026-10.</a:t>
+            </a:r>
+          </a:p>
+          <a:p>
+            <a:pPr>
+              <a:defRPr sz="1400"/>
+            </a:pPr>
+            <a:r>
+              <a:t>CBDA (official). https://www.iiba.org/business-analysis-certifications/business-data-analytics-certification/ last checked 2026-10.</a:t>
+            </a:r>
+          </a:p>
+          <a:p>
+            <a:pPr>
+              <a:defRPr sz="1400"/>
+            </a:pPr>
+            <a:r>
+              <a:t>Google Research, user-centered metrics (official). https://research.google/pubs/measuring-the-user-experience-on-a-large-scale-user-centered-metrics-for-web-applications/ last checked 2026-10.</a:t>
+            </a:r>
+          </a:p>
+          <a:p>
+            <a:pPr>
+              <a:defRPr sz="1400"/>
+            </a:pPr>
+            <a:r>
+              <a:t>Microsoft Learn, What is Power BI? (official). confirm. last checked 2026-10.</a:t>
+            </a:r>
+          </a:p>
+          <a:p>
+            <a:pPr>
+              <a:defRPr sz="1400"/>
+            </a:pPr>
+            <a:r>
+              <a:t>Microsoft Power BI (wikipedia). https://en.wikipedia.org/wiki/Microsoft_Power_BI last checked 2026-10.</a:t>
+            </a:r>
+          </a:p>
+          <a:p>
+            <a:pPr>
+              <a:defRPr sz="1400"/>
+            </a:pPr>
+            <a:r>
+              <a:t>Tableau, Get Started (official). https://help.tableau.com/current/pro/desktop/en-us/gettingstarted_overview.htm last checked 2026-10.</a:t>
+            </a:r>
+          </a:p>
+          <a:p>
+            <a:pPr>
+              <a:defRPr sz="1400"/>
+            </a:pPr>
+            <a:r>
+              <a:t>re:Work OKRs guide (official). confirm. last checked 2026-10.</a:t>
+            </a:r>
+          </a:p>
+        </p:txBody>
+      </p:sp>
+      <p:sp>
+        <p:nvSpPr>
+          <p:cNvPr id="4" name="TextBox 3"/>
+          <p:cNvSpPr txBox="1"/>
+          <p:nvPr/>
+        </p:nvSpPr>
+        <p:spPr>
+          <a:xfrm>
+            <a:off x="457200" y="5623560"/>
+            <a:ext cx="11155680" cy="1005840"/>
+          </a:xfrm>
+          <a:prstGeom prst="rect">
+            <a:avLst/>
+          </a:prstGeom>
+          <a:noFill/>
+        </p:spPr>
+        <p:txBody>
+          <a:bodyPr wrap="square">
+            <a:spAutoFit/>
+          </a:bodyPr>
+          <a:lstStyle/>
+          <a:p>
+            <a:pPr>
+              <a:defRPr sz="1000"/>
+            </a:pPr>
+            <a:r>
+              <a:t>CypherMonkey Labs · © 2026 CypherMonkeyLabs</a:t>
+            </a:r>
+          </a:p>
+          <a:p>
+            <a:r>
+              <a:t>Independent, free, learning-only student project. Respects every company and vendor. Trademarks belong to their owners. Not affiliated or endorsed. Concerns are removed or corrected promptly via the contact form at https</a:t>
+            </a:r>
+          </a:p>
+        </p:txBody>
+      </p:sp>
+      <p:sp>
+        <p:nvSpPr>
+          <p:cNvPr id="5" name="TextBox 4">
+            <a:hlinkClick r:id="rId2"/>
+          </p:cNvPr>
+          <p:cNvSpPr txBox="1"/>
+          <p:nvPr/>
+        </p:nvSpPr>
+        <p:spPr>
+          <a:xfrm>
+            <a:off x="457200" y="6355080"/>
+            <a:ext cx="2011680" cy="320040"/>
+          </a:xfrm>
+          <a:prstGeom prst="rect">
+            <a:avLst/>
+          </a:prstGeom>
+          <a:noFill/>
+        </p:spPr>
+        <p:txBody>
+          <a:bodyPr wrap="none">
+            <a:spAutoFit/>
+          </a:bodyPr>
+          <a:lstStyle/>
+          <a:p>
+            <a:pPr>
+              <a:defRPr sz="1200"/>
+            </a:pPr>
+            <a:r>
+              <a:t>Website</a:t>
+            </a:r>
+          </a:p>
+        </p:txBody>
+      </p:sp>
+      <p:sp>
+        <p:nvSpPr>
+          <p:cNvPr id="6" name="TextBox 5">
+            <a:hlinkClick r:id="rId3"/>
+          </p:cNvPr>
+          <p:cNvSpPr txBox="1"/>
+          <p:nvPr/>
+        </p:nvSpPr>
+        <p:spPr>
+          <a:xfrm>
+            <a:off x="2560320" y="6355080"/>
+            <a:ext cx="2011680" cy="320040"/>
+          </a:xfrm>
+          <a:prstGeom prst="rect">
+            <a:avLst/>
+          </a:prstGeom>
+          <a:noFill/>
+        </p:spPr>
+        <p:txBody>
+          <a:bodyPr wrap="none">
+            <a:spAutoFit/>
+          </a:bodyPr>
+          <a:lstStyle/>
+          <a:p>
+            <a:pPr>
+              <a:defRPr sz="1200"/>
+            </a:pPr>
+            <a:r>
+              <a:t>GitHub</a:t>
+            </a:r>
+          </a:p>
+        </p:txBody>
+      </p:sp>
+      <p:sp>
+        <p:nvSpPr>
+          <p:cNvPr id="7" name="TextBox 6">
+            <a:hlinkClick r:id="rId4"/>
+          </p:cNvPr>
+          <p:cNvSpPr txBox="1"/>
+          <p:nvPr/>
+        </p:nvSpPr>
+        <p:spPr>
+          <a:xfrm>
+            <a:off x="4663440" y="6355080"/>
+            <a:ext cx="2011680" cy="320040"/>
+          </a:xfrm>
+          <a:prstGeom prst="rect">
+            <a:avLst/>
+          </a:prstGeom>
+          <a:noFill/>
+        </p:spPr>
+        <p:txBody>
+          <a:bodyPr wrap="none">
+            <a:spAutoFit/>
+          </a:bodyPr>
+          <a:lstStyle/>
+          <a:p>
+            <a:pPr>
+              <a:defRPr sz="1200"/>
+            </a:pPr>
+            <a:r>
+              <a:t>Profile</a:t>
+            </a:r>
+          </a:p>
+        </p:txBody>
+      </p:sp>
+    </p:spTree>
+  </p:cSld>
+  <p:clrMapOvr>
+    <a:masterClrMapping/>
+  </p:clrMapOvr>
+</p:sld>
+</file>
+
+<file path=ppt/slides/slide7.xml><?xml version="1.0" encoding="utf-8"?>
+<p:sld xmlns:a="http://schemas.openxmlformats.org/drawingml/2006/main" xmlns:p="http://schemas.openxmlformats.org/presentationml/2006/main" xmlns:r="http://schemas.openxmlformats.org/officeDocument/2006/relationships">
+  <p:cSld>
+    <p:spTree>
+      <p:nvGrpSpPr>
+        <p:cNvPr id="1" name=""/>
+        <p:cNvGrpSpPr/>
+        <p:nvPr/>
+      </p:nvGrpSpPr>
+      <p:grpSpPr/>
+      <p:sp>
+        <p:nvSpPr>
+          <p:cNvPr id="2" name="TextBox 1"/>
+          <p:cNvSpPr txBox="1"/>
+          <p:nvPr/>
+        </p:nvSpPr>
+        <p:spPr>
+          <a:xfrm>
+            <a:off x="457200" y="274320"/>
+            <a:ext cx="11155680" cy="640080"/>
+          </a:xfrm>
+          <a:prstGeom prst="rect">
+            <a:avLst/>
+          </a:prstGeom>
+          <a:noFill/>
+        </p:spPr>
+        <p:txBody>
+          <a:bodyPr wrap="none">
+            <a:spAutoFit/>
+          </a:bodyPr>
+          <a:lstStyle/>
+          <a:p>
+            <a:pPr>
+              <a:defRPr sz="2800" b="1"/>
+            </a:pPr>
+            <a:r>
+              <a:t>Sources and go deeper, continued</a:t>
+            </a:r>
+          </a:p>
+        </p:txBody>
+      </p:sp>
+      <p:sp>
+        <p:nvSpPr>
+          <p:cNvPr id="3" name="TextBox 2"/>
+          <p:cNvSpPr txBox="1"/>
+          <p:nvPr/>
+        </p:nvSpPr>
+        <p:spPr>
+          <a:xfrm>
+            <a:off x="548640" y="1051560"/>
+            <a:ext cx="10972800" cy="4297680"/>
+          </a:xfrm>
+          <a:prstGeom prst="rect">
+            <a:avLst/>
+          </a:prstGeom>
+          <a:noFill/>
+        </p:spPr>
+        <p:txBody>
+          <a:bodyPr wrap="square">
+            <a:spAutoFit/>
+          </a:bodyPr>
+          <a:lstStyle/>
+          <a:p>
+            <a:pPr>
+              <a:defRPr sz="1400"/>
+            </a:pPr>
+            <a:r>
+              <a:t>Objectives and key results (wikipedia). https://en.wikipedia.org/wiki/OKR last checked 2026-10.</a:t>
             </a:r>
           </a:p>
         </p:txBody>

--- a/downloads/rooms/data.pptx
+++ b/downloads/rooms/data.pptx
@@ -3195,7 +3195,7 @@
           </a:p>
           <a:p>
             <a:r>
-              <a:t>Independent, free, learning-only student project. Respects every company and vendor. Trademarks belong to their owners. Not affiliated or endorsed. Concerns are removed or corrected promptly via the contact form at https</a:t>
+              <a:t>Independent, free, learning-only student project. Respects every company and vendor. Trademarks belong to their owners. Not affiliated or endorsed. Names in the contact-center rooms are citations of pages opened in Octob</a:t>
             </a:r>
           </a:p>
         </p:txBody>
@@ -3410,7 +3410,7 @@
           </a:p>
           <a:p>
             <a:r>
-              <a:t>Independent, free, learning-only student project. Respects every company and vendor. Trademarks belong to their owners. Not affiliated or endorsed. Concerns are removed or corrected promptly via the contact form at https</a:t>
+              <a:t>Independent, free, learning-only student project. Respects every company and vendor. Trademarks belong to their owners. Not affiliated or endorsed. Names in the contact-center rooms are citations of pages opened in Octob</a:t>
             </a:r>
           </a:p>
         </p:txBody>
@@ -3633,7 +3633,7 @@
           </a:p>
           <a:p>
             <a:r>
-              <a:t>Independent, free, learning-only student project. Respects every company and vendor. Trademarks belong to their owners. Not affiliated or endorsed. Concerns are removed or corrected promptly via the contact form at https</a:t>
+              <a:t>Independent, free, learning-only student project. Respects every company and vendor. Trademarks belong to their owners. Not affiliated or endorsed. Names in the contact-center rooms are citations of pages opened in Octob</a:t>
             </a:r>
           </a:p>
         </p:txBody>
@@ -3896,7 +3896,7 @@
           </a:p>
           <a:p>
             <a:r>
-              <a:t>Independent, free, learning-only student project. Respects every company and vendor. Trademarks belong to their owners. Not affiliated or endorsed. Concerns are removed or corrected promptly via the contact form at https</a:t>
+              <a:t>Independent, free, learning-only student project. Respects every company and vendor. Trademarks belong to their owners. Not affiliated or endorsed. Names in the contact-center rooms are citations of pages opened in Octob</a:t>
             </a:r>
           </a:p>
         </p:txBody>
@@ -4159,7 +4159,7 @@
           </a:p>
           <a:p>
             <a:r>
-              <a:t>Independent, free, learning-only student project. Respects every company and vendor. Trademarks belong to their owners. Not affiliated or endorsed. Concerns are removed or corrected promptly via the contact form at https</a:t>
+              <a:t>Independent, free, learning-only student project. Respects every company and vendor. Trademarks belong to their owners. Not affiliated or endorsed. Names in the contact-center rooms are citations of pages opened in Octob</a:t>
             </a:r>
           </a:p>
         </p:txBody>
@@ -4422,7 +4422,7 @@
           </a:p>
           <a:p>
             <a:r>
-              <a:t>Independent, free, learning-only student project. Respects every company and vendor. Trademarks belong to their owners. Not affiliated or endorsed. Concerns are removed or corrected promptly via the contact form at https</a:t>
+              <a:t>Independent, free, learning-only student project. Respects every company and vendor. Trademarks belong to their owners. Not affiliated or endorsed. Names in the contact-center rooms are citations of pages opened in Octob</a:t>
             </a:r>
           </a:p>
         </p:txBody>
@@ -4637,7 +4637,7 @@
           </a:p>
           <a:p>
             <a:r>
-              <a:t>Independent, free, learning-only student project. Respects every company and vendor. Trademarks belong to their owners. Not affiliated or endorsed. Concerns are removed or corrected promptly via the contact form at https</a:t>
+              <a:t>Independent, free, learning-only student project. Respects every company and vendor. Trademarks belong to their owners. Not affiliated or endorsed. Names in the contact-center rooms are citations of pages opened in Octob</a:t>
             </a:r>
           </a:p>
         </p:txBody>
